--- a/temp_test/output.pptx
+++ b/temp_test/output.pptx
@@ -3143,27 +3143,37 @@
           </a:p>
           <a:p>
             <a:r>
+              <a:t>Submitted on  </a:t>
+            </a:r>
+          </a:p>
+          <a:p>
+            <a:r>
+              <a:t>Name/Signed:  </a:t>
+            </a:r>
+          </a:p>
+          <a:p>
+            <a:r>
               <a:t> </a:t>
             </a:r>
           </a:p>
           <a:p>
             <a:r>
-              <a:t>Name/Signed:  </a:t>
-            </a:r>
-          </a:p>
-          <a:p>
-            <a:r>
-              <a:t>Module leader:  </a:t>
-            </a:r>
-          </a:p>
-          <a:p>
-            <a:r>
               <a:t>Module lead's name:  </a:t>
             </a:r>
           </a:p>
           <a:p>
             <a:r>
-              <a:t>Module Lead:  </a:t>
+              <a:t> </a:t>
+            </a:r>
+          </a:p>
+          <a:p>
+            <a:r>
+              <a:t> </a:t>
+            </a:r>
+          </a:p>
+          <a:p>
+            <a:r>
+              <a:t> </a:t>
             </a:r>
           </a:p>
           <a:p>

--- a/temp_test/output.pptx
+++ b/temp_test/output.pptx
@@ -3173,7 +3173,7 @@
           </a:p>
           <a:p>
             <a:r>
-              <a:t> </a:t>
+              <a:t>Module Code: BM414</a:t>
             </a:r>
           </a:p>
           <a:p>
